--- a/dist/weeks-포트폴리오제작/포트폴리오제작_07주차_콘텐츠구조화2.pptx
+++ b/dist/weeks-포트폴리오제작/포트폴리오제작_07주차_콘텐츠구조화2.pptx
@@ -2870,7 +2870,7 @@
         <p:spPr>
           <a:xfrm>
             <a:off x="1353312" y="1755648"/>
-            <a:ext cx="4248760" cy="585216"/>
+            <a:ext cx="4267048" cy="585216"/>
           </a:xfrm>
           <a:prstGeom prst="rect">
             <a:avLst/>
@@ -2998,7 +2998,7 @@
         <p:spPr>
           <a:xfrm>
             <a:off x="1353312" y="2487168"/>
-            <a:ext cx="4248760" cy="585216"/>
+            <a:ext cx="4267048" cy="585216"/>
           </a:xfrm>
           <a:prstGeom prst="rect">
             <a:avLst/>
@@ -3126,7 +3126,7 @@
         <p:spPr>
           <a:xfrm>
             <a:off x="1353312" y="3218688"/>
-            <a:ext cx="4248760" cy="585216"/>
+            <a:ext cx="4267048" cy="585216"/>
           </a:xfrm>
           <a:prstGeom prst="rect">
             <a:avLst/>
@@ -3254,7 +3254,7 @@
         <p:spPr>
           <a:xfrm>
             <a:off x="1353312" y="3950208"/>
-            <a:ext cx="4248760" cy="585216"/>
+            <a:ext cx="4267048" cy="585216"/>
           </a:xfrm>
           <a:prstGeom prst="rect">
             <a:avLst/>
@@ -3382,7 +3382,7 @@
         <p:spPr>
           <a:xfrm>
             <a:off x="7010248" y="1755648"/>
-            <a:ext cx="4248760" cy="585216"/>
+            <a:ext cx="4267048" cy="585216"/>
           </a:xfrm>
           <a:prstGeom prst="rect">
             <a:avLst/>
@@ -3510,7 +3510,7 @@
         <p:spPr>
           <a:xfrm>
             <a:off x="7010248" y="2487168"/>
-            <a:ext cx="4248760" cy="585216"/>
+            <a:ext cx="4267048" cy="585216"/>
           </a:xfrm>
           <a:prstGeom prst="rect">
             <a:avLst/>
@@ -3638,7 +3638,7 @@
         <p:spPr>
           <a:xfrm>
             <a:off x="7010248" y="3218688"/>
-            <a:ext cx="4248760" cy="585216"/>
+            <a:ext cx="4267048" cy="585216"/>
           </a:xfrm>
           <a:prstGeom prst="rect">
             <a:avLst/>
@@ -3766,7 +3766,7 @@
         <p:spPr>
           <a:xfrm>
             <a:off x="7010248" y="3950208"/>
-            <a:ext cx="4248760" cy="585216"/>
+            <a:ext cx="4267048" cy="585216"/>
           </a:xfrm>
           <a:prstGeom prst="rect">
             <a:avLst/>
@@ -3804,7 +3804,7 @@
         </p:nvSpPr>
         <p:spPr>
           <a:xfrm>
-            <a:off x="640080" y="5468112"/>
+            <a:off x="640080" y="4736592"/>
             <a:ext cx="10911535" cy="7315"/>
           </a:xfrm>
           <a:prstGeom prst="rect">
@@ -3829,7 +3829,7 @@
         </p:nvSpPr>
         <p:spPr>
           <a:xfrm>
-            <a:off x="640080" y="5577840"/>
+            <a:off x="640080" y="4846320"/>
             <a:ext cx="10911535" cy="402336"/>
           </a:xfrm>
           <a:prstGeom prst="rect">

--- a/dist/weeks-포트폴리오제작/포트폴리오제작_07주차_콘텐츠구조화2.pptx
+++ b/dist/weeks-포트폴리오제작/포트폴리오제작_07주차_콘텐츠구조화2.pptx
@@ -2333,7 +2333,7 @@
                 <a:ea typeface="Pretendard" pitchFamily="34" charset="-122"/>
                 <a:cs typeface="Pretendard" pitchFamily="34" charset="-120"/>
               </a:rPr>
-              <a:t>90분 — 강의 20분 · 실습·개별 피드백 50분 · 발표 안내 20분</a:t>
+              <a:t>120분 — 강의 20분 · 실습·개별 피드백 75분 · 발표 안내 15분</a:t>
             </a:r>
             <a:endParaRPr lang="en-US" sz="1200" dirty="0"/>
           </a:p>
@@ -5401,7 +5401,7 @@
                 <a:ea typeface="Pretendard Black" pitchFamily="34" charset="-122"/>
                 <a:cs typeface="Pretendard Black" pitchFamily="34" charset="-120"/>
               </a:rPr>
-              <a:t>오늘의 90분</a:t>
+              <a:t>오늘의 120분</a:t>
             </a:r>
             <a:endParaRPr lang="en-US" sz="3000" dirty="0"/>
           </a:p>
@@ -5440,7 +5440,7 @@
                 <a:ea typeface="Pretendard" pitchFamily="34" charset="-122"/>
                 <a:cs typeface="Pretendard" pitchFamily="34" charset="-120"/>
               </a:rPr>
-              <a:t>강의 20분 · 실습·개별 피드백 50분 · 발표 안내 20분</a:t>
+              <a:t>강의 20분 · 실습·개별 피드백 75분 · 발표 안내 15분</a:t>
             </a:r>
             <a:endParaRPr lang="en-US" sz="1150" dirty="0"/>
           </a:p>
@@ -5480,7 +5480,7 @@
         <p:spPr>
           <a:xfrm>
             <a:off x="640080" y="1719072"/>
-            <a:ext cx="1600200" cy="932688"/>
+            <a:ext cx="1600200" cy="830275"/>
           </a:xfrm>
           <a:prstGeom prst="rect">
             <a:avLst/>
@@ -5519,7 +5519,7 @@
         <p:spPr>
           <a:xfrm>
             <a:off x="2377440" y="1719072"/>
-            <a:ext cx="6888175" cy="932688"/>
+            <a:ext cx="6888175" cy="830275"/>
           </a:xfrm>
           <a:prstGeom prst="rect">
             <a:avLst/>
@@ -5558,7 +5558,7 @@
         <p:spPr>
           <a:xfrm>
             <a:off x="9265615" y="1719072"/>
-            <a:ext cx="2286000" cy="932688"/>
+            <a:ext cx="2286000" cy="830275"/>
           </a:xfrm>
           <a:prstGeom prst="rect">
             <a:avLst/>
@@ -5596,7 +5596,7 @@
         </p:nvSpPr>
         <p:spPr>
           <a:xfrm>
-            <a:off x="640080" y="2633472"/>
+            <a:off x="640080" y="2531059"/>
             <a:ext cx="10911535" cy="7315"/>
           </a:xfrm>
           <a:prstGeom prst="rect">
@@ -5621,8 +5621,8 @@
         </p:nvSpPr>
         <p:spPr>
           <a:xfrm>
-            <a:off x="640080" y="2651760"/>
-            <a:ext cx="1600200" cy="932688"/>
+            <a:off x="640080" y="2549347"/>
+            <a:ext cx="1600200" cy="830275"/>
           </a:xfrm>
           <a:prstGeom prst="rect">
             <a:avLst/>
@@ -5646,7 +5646,7 @@
                 <a:ea typeface="Pretendard" pitchFamily="34" charset="-122"/>
                 <a:cs typeface="Pretendard" pitchFamily="34" charset="-120"/>
               </a:rPr>
-              <a:t>00:20–01:10</a:t>
+              <a:t>00:20–01:05</a:t>
             </a:r>
             <a:endParaRPr lang="en-US" sz="1050" dirty="0"/>
           </a:p>
@@ -5660,8 +5660,8 @@
         </p:nvSpPr>
         <p:spPr>
           <a:xfrm>
-            <a:off x="2377440" y="2651760"/>
-            <a:ext cx="6888175" cy="932688"/>
+            <a:off x="2377440" y="2549347"/>
+            <a:ext cx="6888175" cy="830275"/>
           </a:xfrm>
           <a:prstGeom prst="rect">
             <a:avLst/>
@@ -5685,7 +5685,7 @@
                 <a:ea typeface="Pretendard" pitchFamily="34" charset="-122"/>
                 <a:cs typeface="Pretendard" pitchFamily="34" charset="-120"/>
               </a:rPr>
-              <a:t>실습 및 개별 피드백</a:t>
+              <a:t>실습 및 개별 피드백 (1)</a:t>
             </a:r>
             <a:endParaRPr lang="en-US" sz="1300" dirty="0"/>
           </a:p>
@@ -5699,8 +5699,8 @@
         </p:nvSpPr>
         <p:spPr>
           <a:xfrm>
-            <a:off x="9265615" y="2651760"/>
-            <a:ext cx="2286000" cy="932688"/>
+            <a:off x="9265615" y="2549347"/>
+            <a:ext cx="2286000" cy="830275"/>
           </a:xfrm>
           <a:prstGeom prst="rect">
             <a:avLst/>
@@ -5738,7 +5738,7 @@
         </p:nvSpPr>
         <p:spPr>
           <a:xfrm>
-            <a:off x="640080" y="3566160"/>
+            <a:off x="640080" y="3361334"/>
             <a:ext cx="10911535" cy="7315"/>
           </a:xfrm>
           <a:prstGeom prst="rect">
@@ -5763,8 +5763,111 @@
         </p:nvSpPr>
         <p:spPr>
           <a:xfrm>
-            <a:off x="640080" y="3584448"/>
-            <a:ext cx="1600200" cy="932688"/>
+            <a:off x="640080" y="3379622"/>
+            <a:ext cx="1600200" cy="830275"/>
+          </a:xfrm>
+          <a:prstGeom prst="rect">
+            <a:avLst/>
+          </a:prstGeom>
+          <a:noFill/>
+          <a:ln/>
+        </p:spPr>
+        <p:txBody>
+          <a:bodyPr wrap="square" lIns="0" tIns="0" rIns="0" bIns="0" rtlCol="0" anchor="ctr"/>
+          <a:lstStyle/>
+          <a:p>
+            <a:pPr indent="0" marL="0">
+              <a:buNone/>
+            </a:pPr>
+            <a:r>
+              <a:rPr lang="en-US" sz="1050" spc="60" kern="0" dirty="0">
+                <a:solidFill>
+                  <a:srgbClr val="9B9B9B"/>
+                </a:solidFill>
+                <a:latin typeface="Pretendard" pitchFamily="34" charset="0"/>
+                <a:ea typeface="Pretendard" pitchFamily="34" charset="-122"/>
+                <a:cs typeface="Pretendard" pitchFamily="34" charset="-120"/>
+              </a:rPr>
+              <a:t>01:05–01:15</a:t>
+            </a:r>
+            <a:endParaRPr lang="en-US" sz="1050" dirty="0"/>
+          </a:p>
+        </p:txBody>
+      </p:sp>
+      <p:sp>
+        <p:nvSpPr>
+          <p:cNvPr id="19" name="Text 17"/>
+          <p:cNvSpPr/>
+          <p:nvPr/>
+        </p:nvSpPr>
+        <p:spPr>
+          <a:xfrm>
+            <a:off x="2377440" y="3379622"/>
+            <a:ext cx="6888175" cy="830275"/>
+          </a:xfrm>
+          <a:prstGeom prst="rect">
+            <a:avLst/>
+          </a:prstGeom>
+          <a:noFill/>
+          <a:ln/>
+        </p:spPr>
+        <p:txBody>
+          <a:bodyPr wrap="square" lIns="0" tIns="0" rIns="0" bIns="0" rtlCol="0" anchor="ctr"/>
+          <a:lstStyle/>
+          <a:p>
+            <a:pPr indent="0" marL="0">
+              <a:buNone/>
+            </a:pPr>
+            <a:r>
+              <a:rPr lang="en-US" sz="1100" dirty="0">
+                <a:solidFill>
+                  <a:srgbClr val="9B9B9B"/>
+                </a:solidFill>
+                <a:latin typeface="Pretendard" pitchFamily="34" charset="0"/>
+                <a:ea typeface="Pretendard" pitchFamily="34" charset="-122"/>
+                <a:cs typeface="Pretendard" pitchFamily="34" charset="-120"/>
+              </a:rPr>
+              <a:t>휴식</a:t>
+            </a:r>
+            <a:endParaRPr lang="en-US" sz="1100" dirty="0"/>
+          </a:p>
+        </p:txBody>
+      </p:sp>
+      <p:sp>
+        <p:nvSpPr>
+          <p:cNvPr id="20" name="Shape 18"/>
+          <p:cNvSpPr/>
+          <p:nvPr/>
+        </p:nvSpPr>
+        <p:spPr>
+          <a:xfrm>
+            <a:off x="640080" y="4191610"/>
+            <a:ext cx="10911535" cy="7315"/>
+          </a:xfrm>
+          <a:prstGeom prst="rect">
+            <a:avLst/>
+          </a:prstGeom>
+          <a:solidFill>
+            <a:srgbClr val="EFEFEF"/>
+          </a:solidFill>
+          <a:ln w="12700">
+            <a:solidFill>
+              <a:srgbClr val="EFEFEF"/>
+            </a:solidFill>
+            <a:prstDash val="solid"/>
+          </a:ln>
+        </p:spPr>
+      </p:sp>
+      <p:sp>
+        <p:nvSpPr>
+          <p:cNvPr id="21" name="Text 19"/>
+          <p:cNvSpPr/>
+          <p:nvPr/>
+        </p:nvSpPr>
+        <p:spPr>
+          <a:xfrm>
+            <a:off x="640080" y="4209898"/>
+            <a:ext cx="1600200" cy="830275"/>
           </a:xfrm>
           <a:prstGeom prst="rect">
             <a:avLst/>
@@ -5788,7 +5891,7 @@
                 <a:ea typeface="Pretendard" pitchFamily="34" charset="-122"/>
                 <a:cs typeface="Pretendard" pitchFamily="34" charset="-120"/>
               </a:rPr>
-              <a:t>01:10–01:30</a:t>
+              <a:t>01:15–01:45</a:t>
             </a:r>
             <a:endParaRPr lang="en-US" sz="1050" dirty="0"/>
           </a:p>
@@ -5796,14 +5899,14 @@
       </p:sp>
       <p:sp>
         <p:nvSpPr>
-          <p:cNvPr id="19" name="Text 17"/>
-          <p:cNvSpPr/>
-          <p:nvPr/>
-        </p:nvSpPr>
-        <p:spPr>
-          <a:xfrm>
-            <a:off x="2377440" y="3584448"/>
-            <a:ext cx="6888175" cy="932688"/>
+          <p:cNvPr id="22" name="Text 20"/>
+          <p:cNvSpPr/>
+          <p:nvPr/>
+        </p:nvSpPr>
+        <p:spPr>
+          <a:xfrm>
+            <a:off x="2377440" y="4209898"/>
+            <a:ext cx="6888175" cy="830275"/>
           </a:xfrm>
           <a:prstGeom prst="rect">
             <a:avLst/>
@@ -5827,6 +5930,148 @@
                 <a:ea typeface="Pretendard" pitchFamily="34" charset="-122"/>
                 <a:cs typeface="Pretendard" pitchFamily="34" charset="-120"/>
               </a:rPr>
+              <a:t>실습 및 개별 피드백 (2)</a:t>
+            </a:r>
+            <a:endParaRPr lang="en-US" sz="1300" dirty="0"/>
+          </a:p>
+        </p:txBody>
+      </p:sp>
+      <p:sp>
+        <p:nvSpPr>
+          <p:cNvPr id="23" name="Text 21"/>
+          <p:cNvSpPr/>
+          <p:nvPr/>
+        </p:nvSpPr>
+        <p:spPr>
+          <a:xfrm>
+            <a:off x="9265615" y="4209898"/>
+            <a:ext cx="2286000" cy="830275"/>
+          </a:xfrm>
+          <a:prstGeom prst="rect">
+            <a:avLst/>
+          </a:prstGeom>
+          <a:noFill/>
+          <a:ln/>
+        </p:spPr>
+        <p:txBody>
+          <a:bodyPr wrap="square" lIns="0" tIns="0" rIns="0" bIns="0" rtlCol="0" anchor="ctr"/>
+          <a:lstStyle/>
+          <a:p>
+            <a:pPr algn="r" indent="0" marL="0">
+              <a:buNone/>
+            </a:pPr>
+            <a:r>
+              <a:rPr lang="en-US" sz="1050" dirty="0">
+                <a:solidFill>
+                  <a:srgbClr val="6E6E6E"/>
+                </a:solidFill>
+                <a:latin typeface="Pretendard" pitchFamily="34" charset="0"/>
+                <a:ea typeface="Pretendard" pitchFamily="34" charset="-122"/>
+                <a:cs typeface="Pretendard" pitchFamily="34" charset="-120"/>
+              </a:rPr>
+              <a:t>개인 워크 + 순회</a:t>
+            </a:r>
+            <a:endParaRPr lang="en-US" sz="1050" dirty="0"/>
+          </a:p>
+        </p:txBody>
+      </p:sp>
+      <p:sp>
+        <p:nvSpPr>
+          <p:cNvPr id="24" name="Shape 22"/>
+          <p:cNvSpPr/>
+          <p:nvPr/>
+        </p:nvSpPr>
+        <p:spPr>
+          <a:xfrm>
+            <a:off x="640080" y="5021885"/>
+            <a:ext cx="10911535" cy="7315"/>
+          </a:xfrm>
+          <a:prstGeom prst="rect">
+            <a:avLst/>
+          </a:prstGeom>
+          <a:solidFill>
+            <a:srgbClr val="DCDCDC"/>
+          </a:solidFill>
+          <a:ln w="12700">
+            <a:solidFill>
+              <a:srgbClr val="DCDCDC"/>
+            </a:solidFill>
+            <a:prstDash val="solid"/>
+          </a:ln>
+        </p:spPr>
+      </p:sp>
+      <p:sp>
+        <p:nvSpPr>
+          <p:cNvPr id="25" name="Text 23"/>
+          <p:cNvSpPr/>
+          <p:nvPr/>
+        </p:nvSpPr>
+        <p:spPr>
+          <a:xfrm>
+            <a:off x="640080" y="5040173"/>
+            <a:ext cx="1600200" cy="830275"/>
+          </a:xfrm>
+          <a:prstGeom prst="rect">
+            <a:avLst/>
+          </a:prstGeom>
+          <a:noFill/>
+          <a:ln/>
+        </p:spPr>
+        <p:txBody>
+          <a:bodyPr wrap="square" lIns="0" tIns="0" rIns="0" bIns="0" rtlCol="0" anchor="ctr"/>
+          <a:lstStyle/>
+          <a:p>
+            <a:pPr indent="0" marL="0">
+              <a:buNone/>
+            </a:pPr>
+            <a:r>
+              <a:rPr lang="en-US" sz="1050" b="1" spc="60" kern="0" dirty="0">
+                <a:solidFill>
+                  <a:srgbClr val="111111"/>
+                </a:solidFill>
+                <a:latin typeface="Pretendard" pitchFamily="34" charset="0"/>
+                <a:ea typeface="Pretendard" pitchFamily="34" charset="-122"/>
+                <a:cs typeface="Pretendard" pitchFamily="34" charset="-120"/>
+              </a:rPr>
+              <a:t>01:45–02:00</a:t>
+            </a:r>
+            <a:endParaRPr lang="en-US" sz="1050" dirty="0"/>
+          </a:p>
+        </p:txBody>
+      </p:sp>
+      <p:sp>
+        <p:nvSpPr>
+          <p:cNvPr id="26" name="Text 24"/>
+          <p:cNvSpPr/>
+          <p:nvPr/>
+        </p:nvSpPr>
+        <p:spPr>
+          <a:xfrm>
+            <a:off x="2377440" y="5040173"/>
+            <a:ext cx="6888175" cy="830275"/>
+          </a:xfrm>
+          <a:prstGeom prst="rect">
+            <a:avLst/>
+          </a:prstGeom>
+          <a:noFill/>
+          <a:ln/>
+        </p:spPr>
+        <p:txBody>
+          <a:bodyPr wrap="square" lIns="0" tIns="0" rIns="0" bIns="0" rtlCol="0" anchor="ctr"/>
+          <a:lstStyle/>
+          <a:p>
+            <a:pPr indent="0" marL="0">
+              <a:buNone/>
+            </a:pPr>
+            <a:r>
+              <a:rPr lang="en-US" sz="1300" b="1" dirty="0">
+                <a:solidFill>
+                  <a:srgbClr val="111111"/>
+                </a:solidFill>
+                <a:latin typeface="Pretendard" pitchFamily="34" charset="0"/>
+                <a:ea typeface="Pretendard" pitchFamily="34" charset="-122"/>
+                <a:cs typeface="Pretendard" pitchFamily="34" charset="-120"/>
+              </a:rPr>
               <a:t>다음 주 중간 발표 안내</a:t>
             </a:r>
             <a:endParaRPr lang="en-US" sz="1300" dirty="0"/>
@@ -5835,14 +6080,14 @@
       </p:sp>
       <p:sp>
         <p:nvSpPr>
-          <p:cNvPr id="20" name="Text 18"/>
-          <p:cNvSpPr/>
-          <p:nvPr/>
-        </p:nvSpPr>
-        <p:spPr>
-          <a:xfrm>
-            <a:off x="9265615" y="3584448"/>
-            <a:ext cx="2286000" cy="932688"/>
+          <p:cNvPr id="27" name="Text 25"/>
+          <p:cNvSpPr/>
+          <p:nvPr/>
+        </p:nvSpPr>
+        <p:spPr>
+          <a:xfrm>
+            <a:off x="9265615" y="5040173"/>
+            <a:ext cx="2286000" cy="830275"/>
           </a:xfrm>
           <a:prstGeom prst="rect">
             <a:avLst/>
@@ -5874,14 +6119,14 @@
       </p:sp>
       <p:sp>
         <p:nvSpPr>
-          <p:cNvPr id="21" name="Shape 19"/>
-          <p:cNvSpPr/>
-          <p:nvPr/>
-        </p:nvSpPr>
-        <p:spPr>
-          <a:xfrm>
-            <a:off x="640080" y="4828032"/>
-            <a:ext cx="10911535" cy="969264"/>
+          <p:cNvPr id="28" name="Shape 26"/>
+          <p:cNvSpPr/>
+          <p:nvPr/>
+        </p:nvSpPr>
+        <p:spPr>
+          <a:xfrm>
+            <a:off x="640080" y="5852160"/>
+            <a:ext cx="10911535" cy="7315"/>
           </a:xfrm>
           <a:prstGeom prst="rect">
             <a:avLst/>
@@ -5899,88 +6144,7 @@
       </p:sp>
       <p:sp>
         <p:nvSpPr>
-          <p:cNvPr id="22" name="Text 20"/>
-          <p:cNvSpPr/>
-          <p:nvPr/>
-        </p:nvSpPr>
-        <p:spPr>
-          <a:xfrm>
-            <a:off x="1097280" y="5010912"/>
-            <a:ext cx="2743200" cy="256032"/>
-          </a:xfrm>
-          <a:prstGeom prst="rect">
-            <a:avLst/>
-          </a:prstGeom>
-          <a:noFill/>
-          <a:ln/>
-        </p:spPr>
-        <p:txBody>
-          <a:bodyPr wrap="square" lIns="0" tIns="0" rIns="0" bIns="0" rtlCol="0" anchor="ctr"/>
-          <a:lstStyle/>
-          <a:p>
-            <a:pPr indent="0" marL="0">
-              <a:buNone/>
-            </a:pPr>
-            <a:r>
-              <a:rPr lang="en-US" sz="950" spc="240" kern="0" dirty="0">
-                <a:solidFill>
-                  <a:srgbClr val="9A9A9A"/>
-                </a:solidFill>
-                <a:latin typeface="Pretendard" pitchFamily="34" charset="0"/>
-                <a:ea typeface="Pretendard" pitchFamily="34" charset="-122"/>
-                <a:cs typeface="Pretendard" pitchFamily="34" charset="-120"/>
-              </a:rPr>
-              <a:t>오늘 끝나면</a:t>
-            </a:r>
-            <a:endParaRPr lang="en-US" sz="950" dirty="0"/>
-          </a:p>
-        </p:txBody>
-      </p:sp>
-      <p:sp>
-        <p:nvSpPr>
-          <p:cNvPr id="23" name="Text 21"/>
-          <p:cNvSpPr/>
-          <p:nvPr/>
-        </p:nvSpPr>
-        <p:spPr>
-          <a:xfrm>
-            <a:off x="1097280" y="5285232"/>
-            <a:ext cx="9997135" cy="365760"/>
-          </a:xfrm>
-          <a:prstGeom prst="rect">
-            <a:avLst/>
-          </a:prstGeom>
-          <a:noFill/>
-          <a:ln/>
-        </p:spPr>
-        <p:txBody>
-          <a:bodyPr wrap="square" lIns="0" tIns="0" rIns="0" bIns="0" rtlCol="0" anchor="ctr"/>
-          <a:lstStyle/>
-          <a:p>
-            <a:pPr indent="0" marL="0">
-              <a:lnSpc>
-                <a:spcPct val="126000"/>
-              </a:lnSpc>
-              <a:buNone/>
-            </a:pPr>
-            <a:r>
-              <a:rPr lang="en-US" sz="1600" dirty="0">
-                <a:solidFill>
-                  <a:srgbClr val="FFFFFF"/>
-                </a:solidFill>
-                <a:latin typeface="Pretendard Black" pitchFamily="34" charset="0"/>
-                <a:ea typeface="Pretendard Black" pitchFamily="34" charset="-122"/>
-                <a:cs typeface="Pretendard Black" pitchFamily="34" charset="-120"/>
-              </a:rPr>
-              <a:t>과정 페이지와 결과 페이지의 구성이 잡히고, 다음 주 발표에서 무엇을 보여줄지 정해집니다.</a:t>
-            </a:r>
-            <a:endParaRPr lang="en-US" sz="1600" dirty="0"/>
-          </a:p>
-        </p:txBody>
-      </p:sp>
-      <p:sp>
-        <p:nvSpPr>
-          <p:cNvPr id="24" name="Shape 22"/>
+          <p:cNvPr id="29" name="Shape 27"/>
           <p:cNvSpPr/>
           <p:nvPr/>
         </p:nvSpPr>
@@ -6005,7 +6169,7 @@
       </p:sp>
       <p:sp>
         <p:nvSpPr>
-          <p:cNvPr id="25" name="Text 23"/>
+          <p:cNvPr id="30" name="Text 28"/>
           <p:cNvSpPr/>
           <p:nvPr/>
         </p:nvSpPr>
@@ -6044,7 +6208,7 @@
       </p:sp>
       <p:sp>
         <p:nvSpPr>
-          <p:cNvPr id="26" name="Text 24"/>
+          <p:cNvPr id="31" name="Text 29"/>
           <p:cNvSpPr/>
           <p:nvPr/>
         </p:nvSpPr>

--- a/dist/weeks-포트폴리오제작/포트폴리오제작_07주차_콘텐츠구조화2.pptx
+++ b/dist/weeks-포트폴리오제작/포트폴리오제작_07주차_콘텐츠구조화2.pptx
@@ -512,7 +512,8 @@
           <a:p>
             <a:r>
               <a:rPr lang="en-US" dirty="0"/>
-              <a:t>다음 주가 중간 발표다. 마지막 20분 안내를 서둘러 끝내지 말 것 — 발표 준비가 부실하면 8주차가 통째로 낭비된다.</a:t>
+              <a:t>[운영 메모]
+다음 주가 중간 발표다. 마지막 20분 안내를 서둘러 끝내지 말 것 — 발표 준비가 부실하면 8주차가 통째로 낭비된다.</a:t>
             </a:r>
             <a:endParaRPr lang="en-US" dirty="0"/>
           </a:p>
@@ -600,7 +601,8 @@
           <a:p>
             <a:r>
               <a:rPr lang="en-US" dirty="0"/>
-              <a:t>매년 잘된 것만 보여주려는 학생이 많다. 막힌 지점을 말해야 8주차가 의미 있어진다는 점을 강조.</a:t>
+              <a:t>[운영 메모]
+매년 잘된 것만 보여주려는 학생이 많다. 막힌 지점을 말해야 8주차가 의미 있어진다는 점을 강조.</a:t>
             </a:r>
             <a:endParaRPr lang="en-US" dirty="0"/>
           </a:p>
@@ -688,7 +690,8 @@
           <a:p>
             <a:r>
               <a:rPr lang="en-US" dirty="0"/>
-              <a:t>발표 자료를 따로 만들지 말고 지금까지 만든 지면을 그대로 엮게 할 것. 새로 만들면 시간만 쓰고 남는 게 없다.</a:t>
+              <a:t>[운영 메모]
+발표 자료를 따로 만들지 말고 지금까지 만든 지면을 그대로 엮게 할 것. 새로 만들면 시간만 쓰고 남는 게 없다.</a:t>
             </a:r>
             <a:endParaRPr lang="en-US" dirty="0"/>
           </a:p>
@@ -776,7 +779,8 @@
           <a:p>
             <a:r>
               <a:rPr lang="en-US" dirty="0"/>
-              <a:t>실습 50분 동안 전원을 한 번씩 봐야 한다. 한 명당 2분씩 잡고 순회하되, 문제 문장부터 확인할 것.</a:t>
+              <a:t>[운영 메모]
+실습 50분 동안 전원을 한 번씩 봐야 한다. 한 명당 2분씩 잡고 순회하되, 문제 문장부터 확인할 것.</a:t>
             </a:r>
             <a:endParaRPr lang="en-US" dirty="0"/>
           </a:p>
@@ -864,7 +868,8 @@
           <a:p>
             <a:r>
               <a:rPr lang="en-US" dirty="0"/>
-              <a:t>3번은 9~11주차 비주얼 시스템으로 이어진다. 오늘은 구조 차원에서만 다룬다.</a:t>
+              <a:t>[운영 메모]
+3번은 9~11주차 비주얼 시스템으로 이어진다. 오늘은 구조 차원에서만 다룬다.</a:t>
             </a:r>
             <a:endParaRPr lang="en-US" dirty="0"/>
           </a:p>
@@ -952,7 +957,8 @@
           <a:p>
             <a:r>
               <a:rPr lang="en-US" dirty="0"/>
-              <a:t>이 파트가 전체 과목에서 가장 중요한 20분이다.</a:t>
+              <a:t>[운영 메모]
+이 파트가 전체 과목에서 가장 중요한 20분이다.</a:t>
             </a:r>
             <a:endParaRPr lang="en-US" dirty="0"/>
           </a:p>
@@ -1040,7 +1046,8 @@
           <a:p>
             <a:r>
               <a:rPr lang="en-US" dirty="0"/>
-              <a:t>01의 '안 고른 쪽도 보여주라'는 조언이 학생들에게 새롭다. 버린 시안을 다 지운 학생이 많다.</a:t>
+              <a:t>[운영 메모]
+01의 '안 고른 쪽도 보여주라'는 조언이 학생들에게 새롭다. 버린 시안을 다 지운 학생이 많다.</a:t>
             </a:r>
             <a:endParaRPr lang="en-US" dirty="0"/>
           </a:p>
@@ -1128,7 +1135,8 @@
           <a:p>
             <a:r>
               <a:rPr lang="en-US" dirty="0"/>
-              <a:t>오른쪽도 필요하다. 다만 그것만 있으면 안 된다는 점을 분명히 할 것.</a:t>
+              <a:t>[운영 메모]
+오른쪽도 필요하다. 다만 그것만 있으면 안 된다는 점을 분명히 할 것.</a:t>
             </a:r>
             <a:endParaRPr lang="en-US" dirty="0"/>
           </a:p>
@@ -1216,7 +1224,8 @@
           <a:p>
             <a:r>
               <a:rPr lang="en-US" dirty="0"/>
-              <a:t>짧게. 10분 내외.</a:t>
+              <a:t>[운영 메모]
+짧게. 10분 내외.</a:t>
             </a:r>
             <a:endParaRPr lang="en-US" dirty="0"/>
           </a:p>
@@ -1304,7 +1313,8 @@
           <a:p>
             <a:r>
               <a:rPr lang="en-US" dirty="0"/>
-              <a:t>03은 학교 과제에서 어렵다. '없으면 회고 한 줄로 대체'라고 안내할 것.</a:t>
+              <a:t>[운영 메모]
+03은 학교 과제에서 어렵다. '없으면 회고 한 줄로 대체'라고 안내할 것.</a:t>
             </a:r>
             <a:endParaRPr lang="en-US" dirty="0"/>
           </a:p>
@@ -1392,7 +1402,8 @@
           <a:p>
             <a:r>
               <a:rPr lang="en-US" dirty="0"/>
-              <a:t>구조 일관성과 비주얼 일관성을 구분해서 설명할 것. 오늘은 구조.</a:t>
+              <a:t>[운영 메모]
+구조 일관성과 비주얼 일관성을 구분해서 설명할 것. 오늘은 구조.</a:t>
             </a:r>
             <a:endParaRPr lang="en-US" dirty="0"/>
           </a:p>
